--- a/companies/calderwood-partners/Engagements/Brown and Sons/2009.08.18 - Briefing Deck - Brown and Sons.pptx
+++ b/companies/calderwood-partners/Engagements/Brown and Sons/2009.08.18 - Briefing Deck - Brown and Sons.pptx
@@ -3114,7 +3114,7 @@
                   <a:srgbClr val="4A2E2A"/>
                 </a:solidFill>
               </a:rPr>
-              <a:t>Cost Transformation at Brown and Sons: Interim Briefing</a:t>
+              <a:t>Cost Transformation: Brown and Sons</a:t>
             </a:r>
           </a:p>
         </p:txBody>
@@ -3139,27 +3139,9 @@
             </a:r>
           </a:p>
           <a:p>
-            <a:pPr lvl="1"/>
-            <a:r>
-              <a:t>Prepared for Brown and Sons</a:t>
-            </a:r>
-          </a:p>
-          <a:p>
-            <a:pPr lvl="1"/>
-            <a:r>
-              <a:t>For the Finance leadership team</a:t>
-            </a:r>
-          </a:p>
-          <a:p>
-            <a:pPr lvl="1"/>
-            <a:r>
-              <a:t>Prepared by the Calderwood Partners engagement team</a:t>
-            </a:r>
-          </a:p>
-          <a:p>
-            <a:pPr lvl="1"/>
-            <a:r>
-              <a:t>Engagement commenced June 25, 2009</a:t>
+            <a:pPr/>
+            <a:r>
+              <a:t>A progress briefing prepared for Sandra Frazier and the finance leadership by the Calderwood engagement team.</a:t>
             </a:r>
           </a:p>
         </p:txBody>
@@ -3203,7 +3185,7 @@
                   <a:srgbClr val="4A2E2A"/>
                 </a:solidFill>
               </a:rPr>
-              <a:t>Where the work stands</a:t>
+              <a:t>Where the engagement stands</a:t>
             </a:r>
           </a:p>
         </p:txBody>
@@ -3225,25 +3207,25 @@
           <a:p>
             <a:pPr lvl="1"/>
             <a:r>
-              <a:t>Current-state cost baseline built and reconciled to your general ledger and headcount records</a:t>
+              <a:t>The engagement began on June 25, 2009 and is planned to run about seven months.</a:t>
             </a:r>
           </a:p>
           <a:p>
             <a:pPr lvl="1"/>
             <a:r>
-              <a:t>Operations and procurement interviews complete across the main lines of the business</a:t>
+              <a:t>We are in the current-state phase, building and reconciling the cost baseline for Brown and Sons.</a:t>
             </a:r>
           </a:p>
           <a:p>
             <a:pPr lvl="1"/>
             <a:r>
-              <a:t>First savings opportunities identified across procurement, operations, and overhead, and now being sized</a:t>
+              <a:t>The baseline is substantially assembled; a small number of allocations are still being agreed with your finance team.</a:t>
             </a:r>
           </a:p>
           <a:p>
             <a:pPr lvl="1"/>
             <a:r>
-              <a:t>On plan and on budget at this checkpoint, with no scope changes to report</a:t>
+              <a:t>Nothing here is a recommendation yet; today is about the facts the later choices will rest on.</a:t>
             </a:r>
           </a:p>
         </p:txBody>
@@ -3287,7 +3269,7 @@
                   <a:srgbClr val="4A2E2A"/>
                 </a:solidFill>
               </a:rPr>
-              <a:t>How we are working</a:t>
+              <a:t>Your engagement team</a:t>
             </a:r>
           </a:p>
         </p:txBody>
@@ -3309,25 +3291,19 @@
           <a:p>
             <a:pPr lvl="1"/>
             <a:r>
-              <a:t>Every figure is built from your own records, not from outside benchmarks, so the case is one your team can stand behind</a:t>
+              <a:t>Michael Walker, Engagement Manager, is your day-to-day point of contact.</a:t>
             </a:r>
           </a:p>
           <a:p>
             <a:pPr lvl="1"/>
             <a:r>
-              <a:t>Diagnostic before design, design before planning, each stage reconciled to the one before it</a:t>
+              <a:t>James Green builds and maintains the cost model and the exhibits behind it.</a:t>
             </a:r>
           </a:p>
           <a:p>
             <a:pPr lvl="1"/>
             <a:r>
-              <a:t>Weekly contact with your office so nothing waits a month to surface</a:t>
-            </a:r>
-          </a:p>
-          <a:p>
-            <a:pPr lvl="1"/>
-            <a:r>
-              <a:t>Findings shown with the basis attached, never as a headline number to take on trust</a:t>
+              <a:t>Deborah Gordon owns the benchmarking and the comparator analysis.</a:t>
             </a:r>
           </a:p>
         </p:txBody>
@@ -3371,7 +3347,7 @@
                   <a:srgbClr val="4A2E2A"/>
                 </a:solidFill>
               </a:rPr>
-              <a:t>Who is doing the work</a:t>
+              <a:t>What the baseline shows so far</a:t>
             </a:r>
           </a:p>
         </p:txBody>
@@ -3393,25 +3369,19 @@
           <a:p>
             <a:pPr lvl="1"/>
             <a:r>
-              <a:t>Michael Walker, Engagement Manager and your day-to-day contact</a:t>
+              <a:t>Cost concentrates in a small number of functions, more so than the budget alone would suggest.</a:t>
             </a:r>
           </a:p>
           <a:p>
             <a:pPr lvl="1"/>
             <a:r>
-              <a:t>James Green, Senior Associate, leading the cost baseline and spend analysis</a:t>
+              <a:t>The support functions carry the clearest overlap and are the first place we will test for savings that are real rather than nominal.</a:t>
             </a:r>
           </a:p>
           <a:p>
             <a:pPr lvl="1"/>
             <a:r>
-              <a:t>Deborah Gordon, Associate, leading the operations work and the synthesis</a:t>
-            </a:r>
-          </a:p>
-          <a:p>
-            <a:pPr lvl="1"/>
-            <a:r>
-              <a:t>Sandra Frazier, VP Finance, sponsoring the engagement on your side</a:t>
+              <a:t>A share of the apparent duplication is tied to standing commitments, and we will keep what can be realized soon separate from what depends on those running their course.</a:t>
             </a:r>
           </a:p>
         </p:txBody>
@@ -3455,7 +3425,7 @@
                   <a:srgbClr val="4A2E2A"/>
                 </a:solidFill>
               </a:rPr>
-              <a:t>What we are seeing so far</a:t>
+              <a:t>The questions we are testing</a:t>
             </a:r>
           </a:p>
         </p:txBody>
@@ -3477,25 +3447,19 @@
           <a:p>
             <a:pPr lvl="1"/>
             <a:r>
-              <a:t>Third-party spend is spread across many vendors; consolidation looks like the single largest opportunity</a:t>
+              <a:t>Which costs can responsibly come out, and in what order the organization can absorb the change.</a:t>
             </a:r>
           </a:p>
           <a:p>
             <a:pPr lvl="1"/>
             <a:r>
-              <a:t>Overhead cost per unit sits above where comparable operations run, concentrated in the support functions</a:t>
+              <a:t>Where the near-term savings are dependable as against where they only appear on paper.</a:t>
             </a:r>
           </a:p>
           <a:p>
             <a:pPr lvl="1"/>
             <a:r>
-              <a:t>Two operating processes carry visible rework; both are being sized now</a:t>
-            </a:r>
-          </a:p>
-          <a:p>
-            <a:pPr lvl="1"/>
-            <a:r>
-              <a:t>These figures are indicative at this stage and will be validated with your teams before anything is committed</a:t>
+              <a:t>How to protect the parts of the business that are already performing while the work proceeds.</a:t>
             </a:r>
           </a:p>
         </p:txBody>
@@ -3561,31 +3525,19 @@
           <a:p>
             <a:pPr lvl="1"/>
             <a:r>
-              <a:t>Validate the savings estimates with your functional leads and firm up the ranges</a:t>
+              <a:t>Close the outstanding allocations with your finance team this month.</a:t>
             </a:r>
           </a:p>
           <a:p>
             <a:pPr lvl="1"/>
             <a:r>
-              <a:t>Build the phased business case, separating quick wins from structural change</a:t>
+              <a:t>Finish the benchmarking and firm up the first read on addressable cost.</a:t>
             </a:r>
           </a:p>
           <a:p>
             <a:pPr lvl="1"/>
             <a:r>
-              <a:t>Draft an implementation roadmap your own managers can run from</a:t>
-            </a:r>
-          </a:p>
-          <a:p>
-            <a:pPr lvl="1"/>
-            <a:r>
-              <a:t>Agree how the benefit will be tracked once the work is handed over</a:t>
-            </a:r>
-          </a:p>
-          <a:p>
-            <a:pPr lvl="1"/>
-            <a:r>
-              <a:t>Interim read-out to Brown and Sons leadership in the coming weeks</a:t>
+              <a:t>Hold a working session with Sandra Frazier's team to review the baseline and agree what to pursue.</a:t>
             </a:r>
           </a:p>
         </p:txBody>
